--- a/viewers/pptx/e2e/fixtures/transitions-animations.pptx
+++ b/viewers/pptx/e2e/fixtures/transitions-animations.pptx
@@ -541,7 +541,7 @@
       </p:sp>
       <p:sp>
         <p:nvSpPr>
-          <p:cNvPr id="4" name="Rectangle 4"/>
+          <p:cNvPr id="2" name="Rectangle 4"/>
           <p:cNvSpPr txBox="0"/>
           <p:nvPr/>
         </p:nvSpPr>
@@ -583,7 +583,7 @@
     <p:ext uri="{A6F62C1B-B45C-4E8A-8B0A-1B3E5F8C8D4A}">
       <pptx:editorMeta>
         <pptx:animations>
-          <pptx:animation elementId="ppt/slides/slide3.xml-shape-1" entrance="fadeIn" durationMs="500" delayMs="0" trigger="onClick"/>
+          <pptx:animation elementId="2" entrance="fadeIn" durationMs="500" delayMs="0" trigger="onClick"/>
         </pptx:animations>
       </pptx:editorMeta>
     </p:ext>
@@ -622,7 +622,7 @@
                                           </p:stCondLst>
                                         </p:cTn>
                                         <p:tgtEl>
-                                          <p:spTgt spid="ppt/slides/slide3.xml-shape-1"/>
+                                          <p:spTgt spid="2"/>
                                         </p:tgtEl>
                                         <p:attrNameLst>
                                           <p:attrName>style.visibility</p:attrName>
@@ -636,7 +636,7 @@
                                       <p:cBhvr>
                                         <p:cTn id="3" dur="500"/>
                                         <p:tgtEl>
-                                          <p:spTgt spid="ppt/slides/slide3.xml-shape-1"/>
+                                          <p:spTgt spid="2"/>
                                         </p:tgtEl>
                                       </p:cBhvr>
                                     </p:animEffect>

--- a/viewers/pptx/e2e/fixtures/transitions-animations.pptx
+++ b/viewers/pptx/e2e/fixtures/transitions-animations.pptx
@@ -579,15 +579,6 @@
   <p:clrMapOvr>
     <a:masterClrMapping/>
   </p:clrMapOvr>
-  <p:extLst>
-    <p:ext uri="{A6F62C1B-B45C-4E8A-8B0A-1B3E5F8C8D4A}">
-      <pptx:editorMeta>
-        <pptx:animations>
-          <pptx:animation elementId="2" entrance="fadeIn" durationMs="500" delayMs="0" trigger="onClick"/>
-        </pptx:animations>
-      </pptx:editorMeta>
-    </p:ext>
-  </p:extLst>
   <p:timing>
     <p:tnLst>
       <p:par>
@@ -671,6 +662,15 @@
       </p:par>
     </p:tnLst>
   </p:timing>
+  <p:extLst>
+    <p:ext uri="{A6F62C1B-B45C-4E8A-8B0A-1B3E5F8C8D4A}">
+      <pptx:editorMeta>
+        <pptx:animations>
+          <pptx:animation elementId="2" entrance="fadeIn" durationMs="500" delayMs="0" trigger="onClick"/>
+        </pptx:animations>
+      </pptx:editorMeta>
+    </p:ext>
+  </p:extLst>
 </p:sld>
 </file>
 

--- a/viewers/pptx/e2e/fixtures/transitions-animations.pptx
+++ b/viewers/pptx/e2e/fixtures/transitions-animations.pptx
@@ -439,7 +439,7 @@
 </file>
 
 <file path=ppt/slides/slide2.xml><?xml version="1.0" encoding="utf-8"?>
-<p:sld xmlns:a="http://schemas.openxmlformats.org/drawingml/2006/main" xmlns:r="http://schemas.openxmlformats.org/officeDocument/2006/relationships" xmlns:p="http://schemas.openxmlformats.org/presentationml/2006/main">
+<p:sld xmlns:a="http://schemas.openxmlformats.org/drawingml/2006/main" xmlns:r="http://schemas.openxmlformats.org/officeDocument/2006/relationships" xmlns:p="http://schemas.openxmlformats.org/presentationml/2006/main" xmlns:p14="http://schemas.microsoft.com/office/powerpoint/2010/main" xmlns:mc="http://schemas.openxmlformats.org/markup-compatibility/2006" mc:Ignorable="p14">
   <p:cSld>
     <p:spTree>
       <p:nvGrpSpPr>
@@ -488,7 +488,7 @@
   <p:clrMapOvr>
     <a:masterClrMapping/>
   </p:clrMapOvr>
-  <p:transition dur="600">
+  <p:transition p14:dur="600">
     <p:fade/>
   </p:transition>
 </p:sld>
@@ -661,6 +661,11 @@
         </p:cTn>
       </p:par>
     </p:tnLst>
+    <p:extLst>
+      <p:ext uri="{4F2D8E71-9C3A-4B16-A5D8-7E0B2C6F91A3}">
+        <pptx:editorTiming xmlns:pptx="http://schemas.pptx.ai/pptx/editor-meta" owned="2:entr"/>
+      </p:ext>
+    </p:extLst>
   </p:timing>
   <p:extLst>
     <p:ext uri="{A6F62C1B-B45C-4E8A-8B0A-1B3E5F8C8D4A}">

--- a/viewers/pptx/e2e/fixtures/transitions-animations.pptx
+++ b/viewers/pptx/e2e/fixtures/transitions-animations.pptx
@@ -365,7 +365,7 @@
           <a:spcPct val="20000"/>
         </a:spcBef>
         <a:buFont typeface="Arial" panose="020B0604020202020204" pitchFamily="34" charset="0"/>
-        <a:buChar char="&amp;#x2022;"/>
+        <a:buChar char="•"/>
         <a:defRPr sz="3200" kern="1200">
           <a:solidFill>
             <a:schemeClr val="tx1"/>

--- a/viewers/pptx/e2e/fixtures/transitions-animations.pptx
+++ b/viewers/pptx/e2e/fixtures/transitions-animations.pptx
@@ -584,7 +584,7 @@
       <p:par>
         <p:cTn id="6" dur="indefinite" restart="never" nodeType="tmRoot">
           <p:childTnLst>
-            <p:seq>
+            <p:seq concurrent="1" nextAc="seek">
               <p:cTn id="7" dur="indefinite" nodeType="mainSeq">
                 <p:childTnLst>
                   <p:par>

--- a/viewers/pptx/e2e/fixtures/transitions-animations.pptx
+++ b/viewers/pptx/e2e/fixtures/transitions-animations.pptx
@@ -698,7 +698,7 @@
       </p:grpSpPr>
       <p:sp>
         <p:nvSpPr>
-          <p:cNvPr id="5" name="TextBox 5"/>
+          <p:cNvPr id="2" name="TextBox 5"/>
           <p:cNvSpPr txBox="1"/>
           <p:nvPr/>
         </p:nvSpPr>

--- a/viewers/pptx/e2e/fixtures/transitions-animations.pptx
+++ b/viewers/pptx/e2e/fixtures/transitions-animations.pptx
@@ -421,12 +421,10 @@
           <a:bodyPr wrap="square"/>
           <a:lstStyle/>
           <a:p>
-            <a:pPr/>
             <a:r>
-              <a:rPr lang="en-US" dirty="0" sz="2400" b="1"/>
+              <a:rPr lang="en-US" sz="2400" b="1" dirty="0"/>
               <a:t>Slide One</a:t>
             </a:r>
-            <a:endParaRPr lang="en-US"/>
           </a:p>
         </p:txBody>
       </p:sp>
@@ -474,12 +472,10 @@
           <a:bodyPr wrap="square"/>
           <a:lstStyle/>
           <a:p>
-            <a:pPr/>
             <a:r>
-              <a:rPr lang="en-US" dirty="0" sz="2400" b="1"/>
+              <a:rPr lang="en-US" sz="2400" b="1" dirty="0"/>
               <a:t>Transition Target</a:t>
             </a:r>
-            <a:endParaRPr lang="en-US"/>
           </a:p>
         </p:txBody>
       </p:sp>
@@ -530,12 +526,10 @@
           <a:bodyPr wrap="square"/>
           <a:lstStyle/>
           <a:p>
-            <a:pPr/>
             <a:r>
-              <a:rPr lang="en-US" dirty="0" sz="2400" b="1"/>
+              <a:rPr lang="en-US" sz="2400" b="1" dirty="0"/>
               <a:t>Animated Slide</a:t>
             </a:r>
-            <a:endParaRPr lang="en-US"/>
           </a:p>
         </p:txBody>
       </p:sp>
@@ -561,16 +555,14 @@
           <a:bodyPr wrap="square"/>
           <a:lstStyle/>
           <a:p>
-            <a:pPr/>
             <a:r>
-              <a:rPr lang="en-US" dirty="0" sz="1800" b="1">
+              <a:rPr lang="en-US" sz="1800" b="1" dirty="0">
                 <a:solidFill>
                   <a:srgbClr val="FFFFFF"/>
                 </a:solidFill>
               </a:rPr>
               <a:t>ANIMATE ME</a:t>
             </a:r>
-            <a:endParaRPr lang="en-US"/>
           </a:p>
         </p:txBody>
       </p:sp>
@@ -600,18 +592,14 @@
                             </p:stCondLst>
                             <p:childTnLst>
                               <p:par>
-                                <p:cTn id="1" presetID="10" presetClass="entr" presetSubtype="0" fill="hold" nodeType="clickEffect" dur="500">
+                                <p:cTn id="1" presetID="10" presetClass="entr" presetSubtype="0" fill="hold" nodeType="clickEffect" dur="500" grpId="0">
                                   <p:stCondLst>
                                     <p:cond delay="0"/>
                                   </p:stCondLst>
                                   <p:childTnLst>
                                     <p:set>
                                       <p:cBhvr>
-                                        <p:cTn id="2" dur="1" fill="hold">
-                                          <p:stCondLst>
-                                            <p:cond delay="0"/>
-                                          </p:stCondLst>
-                                        </p:cTn>
+                                        <p:cTn id="2" dur="1" fill="hold"/>
                                         <p:tgtEl>
                                           <p:spTgt spid="2"/>
                                         </p:tgtEl>
@@ -715,12 +703,10 @@
           <a:bodyPr wrap="square"/>
           <a:lstStyle/>
           <a:p>
-            <a:pPr/>
             <a:r>
-              <a:rPr lang="en-US" dirty="0" sz="2400" b="1"/>
+              <a:rPr lang="en-US" sz="2400" b="1" dirty="0"/>
               <a:t>End Slide</a:t>
             </a:r>
-            <a:endParaRPr lang="en-US"/>
           </a:p>
         </p:txBody>
       </p:sp>
